--- a/docs/plots/carbo/jx_carbo_adjcif_akikdigo.pptx
+++ b/docs/plots/carbo/jx_carbo_adjcif_akikdigo.pptx
@@ -2271,7 +2271,7 @@
           </p:nvSpPr>
           <p:spPr>
             <a:xfrm>
-              <a:off x="972874" y="5148831"/>
+              <a:off x="972874" y="5125478"/>
               <a:ext cx="7644336" cy="0"/>
             </a:xfrm>
             <a:custGeom>
@@ -2314,7 +2314,7 @@
           </p:nvSpPr>
           <p:spPr>
             <a:xfrm>
-              <a:off x="972874" y="4285648"/>
+              <a:off x="972874" y="4215590"/>
               <a:ext cx="7644336" cy="0"/>
             </a:xfrm>
             <a:custGeom>
@@ -2357,7 +2357,7 @@
           </p:nvSpPr>
           <p:spPr>
             <a:xfrm>
-              <a:off x="972874" y="3422466"/>
+              <a:off x="972874" y="3305702"/>
               <a:ext cx="7644336" cy="0"/>
             </a:xfrm>
             <a:custGeom>
@@ -2615,7 +2615,7 @@
           </p:nvSpPr>
           <p:spPr>
             <a:xfrm>
-              <a:off x="972874" y="4717239"/>
+              <a:off x="972874" y="4670534"/>
               <a:ext cx="7644336" cy="0"/>
             </a:xfrm>
             <a:custGeom>
@@ -2658,7 +2658,7 @@
           </p:nvSpPr>
           <p:spPr>
             <a:xfrm>
-              <a:off x="972874" y="3854057"/>
+              <a:off x="972874" y="3760646"/>
               <a:ext cx="7644336" cy="0"/>
             </a:xfrm>
             <a:custGeom>
@@ -2701,7 +2701,7 @@
           </p:nvSpPr>
           <p:spPr>
             <a:xfrm>
-              <a:off x="972874" y="2990875"/>
+              <a:off x="972874" y="2850758"/>
               <a:ext cx="7644336" cy="0"/>
             </a:xfrm>
             <a:custGeom>
@@ -2916,54 +2916,54 @@
           </p:nvSpPr>
           <p:spPr>
             <a:xfrm>
-              <a:off x="1320344" y="4681504"/>
-              <a:ext cx="6949396" cy="588380"/>
+              <a:off x="1320344" y="4600366"/>
+              <a:ext cx="6949396" cy="641261"/>
             </a:xfrm>
             <a:custGeom>
               <a:avLst/>
               <a:pathLst>
-                <a:path w="6949396" h="588380">
+                <a:path w="6949396" h="641261">
                   <a:moveTo>
-                    <a:pt x="0" y="588380"/>
+                    <a:pt x="0" y="641261"/>
                   </a:moveTo>
                   <a:lnTo>
-                    <a:pt x="361007" y="588380"/>
-                  </a:lnTo>
-                  <a:lnTo>
-                    <a:pt x="361007" y="507600"/>
-                  </a:lnTo>
-                  <a:lnTo>
-                    <a:pt x="902519" y="507600"/>
-                  </a:lnTo>
-                  <a:lnTo>
-                    <a:pt x="902519" y="423790"/>
-                  </a:lnTo>
-                  <a:lnTo>
-                    <a:pt x="992770" y="423790"/>
-                  </a:lnTo>
-                  <a:lnTo>
-                    <a:pt x="992770" y="339796"/>
-                  </a:lnTo>
-                  <a:lnTo>
-                    <a:pt x="3790580" y="339796"/>
-                  </a:lnTo>
-                  <a:lnTo>
-                    <a:pt x="3790580" y="255935"/>
-                  </a:lnTo>
-                  <a:lnTo>
-                    <a:pt x="4963854" y="255935"/>
-                  </a:lnTo>
-                  <a:lnTo>
-                    <a:pt x="4963854" y="170802"/>
-                  </a:lnTo>
-                  <a:lnTo>
-                    <a:pt x="5956625" y="170802"/>
-                  </a:lnTo>
-                  <a:lnTo>
-                    <a:pt x="5956625" y="86064"/>
-                  </a:lnTo>
-                  <a:lnTo>
-                    <a:pt x="6949396" y="86064"/>
+                    <a:pt x="361007" y="641261"/>
+                  </a:lnTo>
+                  <a:lnTo>
+                    <a:pt x="361007" y="553447"/>
+                  </a:lnTo>
+                  <a:lnTo>
+                    <a:pt x="902519" y="553447"/>
+                  </a:lnTo>
+                  <a:lnTo>
+                    <a:pt x="902519" y="461932"/>
+                  </a:lnTo>
+                  <a:lnTo>
+                    <a:pt x="992770" y="461932"/>
+                  </a:lnTo>
+                  <a:lnTo>
+                    <a:pt x="992770" y="370487"/>
+                  </a:lnTo>
+                  <a:lnTo>
+                    <a:pt x="3790580" y="370487"/>
+                  </a:lnTo>
+                  <a:lnTo>
+                    <a:pt x="3790580" y="279109"/>
+                  </a:lnTo>
+                  <a:lnTo>
+                    <a:pt x="4963854" y="279109"/>
+                  </a:lnTo>
+                  <a:lnTo>
+                    <a:pt x="4963854" y="186310"/>
+                  </a:lnTo>
+                  <a:lnTo>
+                    <a:pt x="5956625" y="186310"/>
+                  </a:lnTo>
+                  <a:lnTo>
+                    <a:pt x="5956625" y="93870"/>
+                  </a:lnTo>
+                  <a:lnTo>
+                    <a:pt x="6949396" y="93870"/>
                   </a:lnTo>
                   <a:lnTo>
                     <a:pt x="6949396" y="0"/>
@@ -2996,53 +2996,53 @@
           <p:spPr>
             <a:xfrm>
               <a:off x="1320344" y="2861938"/>
-              <a:ext cx="6949396" cy="1732981"/>
+              <a:ext cx="6949396" cy="1736935"/>
             </a:xfrm>
             <a:custGeom>
               <a:avLst/>
               <a:pathLst>
-                <a:path w="6949396" h="1732981">
+                <a:path w="6949396" h="1736935">
                   <a:moveTo>
-                    <a:pt x="0" y="1732981"/>
+                    <a:pt x="0" y="1736935"/>
                   </a:moveTo>
                   <a:lnTo>
-                    <a:pt x="361007" y="1732981"/>
-                  </a:lnTo>
-                  <a:lnTo>
-                    <a:pt x="361007" y="1484858"/>
-                  </a:lnTo>
-                  <a:lnTo>
-                    <a:pt x="902519" y="1484858"/>
-                  </a:lnTo>
-                  <a:lnTo>
-                    <a:pt x="902519" y="1230939"/>
-                  </a:lnTo>
-                  <a:lnTo>
-                    <a:pt x="992770" y="1230939"/>
-                  </a:lnTo>
-                  <a:lnTo>
-                    <a:pt x="992770" y="979995"/>
-                  </a:lnTo>
-                  <a:lnTo>
-                    <a:pt x="3790580" y="979995"/>
-                  </a:lnTo>
-                  <a:lnTo>
-                    <a:pt x="3790580" y="732935"/>
-                  </a:lnTo>
-                  <a:lnTo>
-                    <a:pt x="4963854" y="732935"/>
-                  </a:lnTo>
-                  <a:lnTo>
-                    <a:pt x="4963854" y="485644"/>
-                  </a:lnTo>
-                  <a:lnTo>
-                    <a:pt x="5956625" y="485644"/>
-                  </a:lnTo>
-                  <a:lnTo>
-                    <a:pt x="5956625" y="242974"/>
-                  </a:lnTo>
-                  <a:lnTo>
-                    <a:pt x="6949396" y="242974"/>
+                    <a:pt x="361007" y="1736935"/>
+                  </a:lnTo>
+                  <a:lnTo>
+                    <a:pt x="361007" y="1489893"/>
+                  </a:lnTo>
+                  <a:lnTo>
+                    <a:pt x="902519" y="1489893"/>
+                  </a:lnTo>
+                  <a:lnTo>
+                    <a:pt x="902519" y="1235601"/>
+                  </a:lnTo>
+                  <a:lnTo>
+                    <a:pt x="992770" y="1235601"/>
+                  </a:lnTo>
+                  <a:lnTo>
+                    <a:pt x="992770" y="984689"/>
+                  </a:lnTo>
+                  <a:lnTo>
+                    <a:pt x="3790580" y="984689"/>
+                  </a:lnTo>
+                  <a:lnTo>
+                    <a:pt x="3790580" y="737109"/>
+                  </a:lnTo>
+                  <a:lnTo>
+                    <a:pt x="4963854" y="737109"/>
+                  </a:lnTo>
+                  <a:lnTo>
+                    <a:pt x="4963854" y="488860"/>
+                  </a:lnTo>
+                  <a:lnTo>
+                    <a:pt x="5956625" y="488860"/>
+                  </a:lnTo>
+                  <a:lnTo>
+                    <a:pt x="5956625" y="244727"/>
+                  </a:lnTo>
+                  <a:lnTo>
+                    <a:pt x="6949396" y="244727"/>
                   </a:lnTo>
                   <a:lnTo>
                     <a:pt x="6949396" y="0"/>
@@ -3120,7 +3120,7 @@
           </p:nvSpPr>
           <p:spPr>
             <a:xfrm>
-              <a:off x="692708" y="4677189"/>
+              <a:off x="692708" y="4630483"/>
               <a:ext cx="217535" cy="80101"/>
             </a:xfrm>
             <a:prstGeom prst="rect">
@@ -3166,7 +3166,7 @@
           </p:nvSpPr>
           <p:spPr>
             <a:xfrm>
-              <a:off x="692708" y="3814006"/>
+              <a:off x="692708" y="3720595"/>
               <a:ext cx="217535" cy="80101"/>
             </a:xfrm>
             <a:prstGeom prst="rect">
@@ -3212,7 +3212,7 @@
           </p:nvSpPr>
           <p:spPr>
             <a:xfrm>
-              <a:off x="692708" y="2950824"/>
+              <a:off x="692708" y="2810707"/>
               <a:ext cx="217535" cy="80101"/>
             </a:xfrm>
             <a:prstGeom prst="rect">
@@ -3739,7 +3739,7 @@
                   <a:latin typeface="Helvetica"/>
                   <a:cs typeface="Helvetica"/>
                 </a:rPr>
-                <a:t>Discrep &gt;= +25 vs &lt;+25: subHR = 3.26 (95% CI 0.87-12.24), p = 0.081</a:t>
+                <a:t>Discrep &gt;= +25 vs &lt;+25: subHR = 2.97 (95% CI 0.57-15.41), p = 0.196</a:t>
               </a:r>
             </a:p>
           </p:txBody>

--- a/docs/plots/carbo/jx_carbo_adjcif_akikdigo.pptx
+++ b/docs/plots/carbo/jx_carbo_adjcif_akikdigo.pptx
@@ -2271,7 +2271,7 @@
           </p:nvSpPr>
           <p:spPr>
             <a:xfrm>
-              <a:off x="972874" y="5125478"/>
+              <a:off x="972874" y="5131020"/>
               <a:ext cx="7644336" cy="0"/>
             </a:xfrm>
             <a:custGeom>
@@ -2314,7 +2314,7 @@
           </p:nvSpPr>
           <p:spPr>
             <a:xfrm>
-              <a:off x="972874" y="4215590"/>
+              <a:off x="972874" y="4232217"/>
               <a:ext cx="7644336" cy="0"/>
             </a:xfrm>
             <a:custGeom>
@@ -2357,7 +2357,7 @@
           </p:nvSpPr>
           <p:spPr>
             <a:xfrm>
-              <a:off x="972874" y="3305702"/>
+              <a:off x="972874" y="3333413"/>
               <a:ext cx="7644336" cy="0"/>
             </a:xfrm>
             <a:custGeom>
@@ -2615,7 +2615,7 @@
           </p:nvSpPr>
           <p:spPr>
             <a:xfrm>
-              <a:off x="972874" y="4670534"/>
+              <a:off x="972874" y="4681618"/>
               <a:ext cx="7644336" cy="0"/>
             </a:xfrm>
             <a:custGeom>
@@ -2658,7 +2658,7 @@
           </p:nvSpPr>
           <p:spPr>
             <a:xfrm>
-              <a:off x="972874" y="3760646"/>
+              <a:off x="972874" y="3782815"/>
               <a:ext cx="7644336" cy="0"/>
             </a:xfrm>
             <a:custGeom>
@@ -2701,7 +2701,7 @@
           </p:nvSpPr>
           <p:spPr>
             <a:xfrm>
-              <a:off x="972874" y="2850758"/>
+              <a:off x="972874" y="2884012"/>
               <a:ext cx="7644336" cy="0"/>
             </a:xfrm>
             <a:custGeom>
@@ -2916,54 +2916,54 @@
           </p:nvSpPr>
           <p:spPr>
             <a:xfrm>
-              <a:off x="1320344" y="4600366"/>
-              <a:ext cx="6949396" cy="641261"/>
+              <a:off x="1320344" y="4620033"/>
+              <a:ext cx="6949396" cy="629430"/>
             </a:xfrm>
             <a:custGeom>
               <a:avLst/>
               <a:pathLst>
-                <a:path w="6949396" h="641261">
+                <a:path w="6949396" h="629430">
                   <a:moveTo>
-                    <a:pt x="0" y="641261"/>
+                    <a:pt x="0" y="629430"/>
                   </a:moveTo>
                   <a:lnTo>
-                    <a:pt x="361007" y="641261"/>
-                  </a:lnTo>
-                  <a:lnTo>
-                    <a:pt x="361007" y="553447"/>
-                  </a:lnTo>
-                  <a:lnTo>
-                    <a:pt x="902519" y="553447"/>
-                  </a:lnTo>
-                  <a:lnTo>
-                    <a:pt x="902519" y="461932"/>
-                  </a:lnTo>
-                  <a:lnTo>
-                    <a:pt x="992770" y="461932"/>
-                  </a:lnTo>
-                  <a:lnTo>
-                    <a:pt x="992770" y="370487"/>
-                  </a:lnTo>
-                  <a:lnTo>
-                    <a:pt x="3790580" y="370487"/>
-                  </a:lnTo>
-                  <a:lnTo>
-                    <a:pt x="3790580" y="279109"/>
-                  </a:lnTo>
-                  <a:lnTo>
-                    <a:pt x="4963854" y="279109"/>
-                  </a:lnTo>
-                  <a:lnTo>
-                    <a:pt x="4963854" y="186310"/>
-                  </a:lnTo>
-                  <a:lnTo>
-                    <a:pt x="5956625" y="186310"/>
-                  </a:lnTo>
-                  <a:lnTo>
-                    <a:pt x="5956625" y="93870"/>
-                  </a:lnTo>
-                  <a:lnTo>
-                    <a:pt x="6949396" y="93870"/>
+                    <a:pt x="361007" y="629430"/>
+                  </a:lnTo>
+                  <a:lnTo>
+                    <a:pt x="361007" y="542959"/>
+                  </a:lnTo>
+                  <a:lnTo>
+                    <a:pt x="902519" y="542959"/>
+                  </a:lnTo>
+                  <a:lnTo>
+                    <a:pt x="902519" y="453144"/>
+                  </a:lnTo>
+                  <a:lnTo>
+                    <a:pt x="992770" y="453144"/>
+                  </a:lnTo>
+                  <a:lnTo>
+                    <a:pt x="992770" y="363561"/>
+                  </a:lnTo>
+                  <a:lnTo>
+                    <a:pt x="3790580" y="363561"/>
+                  </a:lnTo>
+                  <a:lnTo>
+                    <a:pt x="3790580" y="274042"/>
+                  </a:lnTo>
+                  <a:lnTo>
+                    <a:pt x="4963854" y="274042"/>
+                  </a:lnTo>
+                  <a:lnTo>
+                    <a:pt x="4963854" y="182940"/>
+                  </a:lnTo>
+                  <a:lnTo>
+                    <a:pt x="5956625" y="182940"/>
+                  </a:lnTo>
+                  <a:lnTo>
+                    <a:pt x="5956625" y="92251"/>
+                  </a:lnTo>
+                  <a:lnTo>
+                    <a:pt x="6949396" y="92251"/>
                   </a:lnTo>
                   <a:lnTo>
                     <a:pt x="6949396" y="0"/>
@@ -2996,53 +2996,53 @@
           <p:spPr>
             <a:xfrm>
               <a:off x="1320344" y="2861938"/>
-              <a:ext cx="6949396" cy="1736935"/>
+              <a:ext cx="6949396" cy="1737622"/>
             </a:xfrm>
             <a:custGeom>
               <a:avLst/>
               <a:pathLst>
-                <a:path w="6949396" h="1736935">
+                <a:path w="6949396" h="1737622">
                   <a:moveTo>
-                    <a:pt x="0" y="1736935"/>
+                    <a:pt x="0" y="1737622"/>
                   </a:moveTo>
                   <a:lnTo>
-                    <a:pt x="361007" y="1736935"/>
-                  </a:lnTo>
-                  <a:lnTo>
-                    <a:pt x="361007" y="1489893"/>
-                  </a:lnTo>
-                  <a:lnTo>
-                    <a:pt x="902519" y="1489893"/>
-                  </a:lnTo>
-                  <a:lnTo>
-                    <a:pt x="902519" y="1235601"/>
-                  </a:lnTo>
-                  <a:lnTo>
-                    <a:pt x="992770" y="1235601"/>
-                  </a:lnTo>
-                  <a:lnTo>
-                    <a:pt x="992770" y="984689"/>
-                  </a:lnTo>
-                  <a:lnTo>
-                    <a:pt x="3790580" y="984689"/>
-                  </a:lnTo>
-                  <a:lnTo>
-                    <a:pt x="3790580" y="737109"/>
-                  </a:lnTo>
-                  <a:lnTo>
-                    <a:pt x="4963854" y="737109"/>
-                  </a:lnTo>
-                  <a:lnTo>
-                    <a:pt x="4963854" y="488860"/>
-                  </a:lnTo>
-                  <a:lnTo>
-                    <a:pt x="5956625" y="488860"/>
-                  </a:lnTo>
-                  <a:lnTo>
-                    <a:pt x="5956625" y="244727"/>
-                  </a:lnTo>
-                  <a:lnTo>
-                    <a:pt x="6949396" y="244727"/>
+                    <a:pt x="361007" y="1737622"/>
+                  </a:lnTo>
+                  <a:lnTo>
+                    <a:pt x="361007" y="1489164"/>
+                  </a:lnTo>
+                  <a:lnTo>
+                    <a:pt x="902519" y="1489164"/>
+                  </a:lnTo>
+                  <a:lnTo>
+                    <a:pt x="902519" y="1234452"/>
+                  </a:lnTo>
+                  <a:lnTo>
+                    <a:pt x="992770" y="1234452"/>
+                  </a:lnTo>
+                  <a:lnTo>
+                    <a:pt x="992770" y="983761"/>
+                  </a:lnTo>
+                  <a:lnTo>
+                    <a:pt x="3790580" y="983761"/>
+                  </a:lnTo>
+                  <a:lnTo>
+                    <a:pt x="3790580" y="736563"/>
+                  </a:lnTo>
+                  <a:lnTo>
+                    <a:pt x="4963854" y="736563"/>
+                  </a:lnTo>
+                  <a:lnTo>
+                    <a:pt x="4963854" y="488353"/>
+                  </a:lnTo>
+                  <a:lnTo>
+                    <a:pt x="5956625" y="488353"/>
+                  </a:lnTo>
+                  <a:lnTo>
+                    <a:pt x="5956625" y="244593"/>
+                  </a:lnTo>
+                  <a:lnTo>
+                    <a:pt x="6949396" y="244593"/>
                   </a:lnTo>
                   <a:lnTo>
                     <a:pt x="6949396" y="0"/>
@@ -3120,7 +3120,7 @@
           </p:nvSpPr>
           <p:spPr>
             <a:xfrm>
-              <a:off x="692708" y="4630483"/>
+              <a:off x="692708" y="4641568"/>
               <a:ext cx="217535" cy="80101"/>
             </a:xfrm>
             <a:prstGeom prst="rect">
@@ -3166,7 +3166,7 @@
           </p:nvSpPr>
           <p:spPr>
             <a:xfrm>
-              <a:off x="692708" y="3720595"/>
+              <a:off x="692708" y="3742764"/>
               <a:ext cx="217535" cy="80101"/>
             </a:xfrm>
             <a:prstGeom prst="rect">
@@ -3212,7 +3212,7 @@
           </p:nvSpPr>
           <p:spPr>
             <a:xfrm>
-              <a:off x="692708" y="2810707"/>
+              <a:off x="692708" y="2843961"/>
               <a:ext cx="217535" cy="80101"/>
             </a:xfrm>
             <a:prstGeom prst="rect">
@@ -3739,7 +3739,7 @@
                   <a:latin typeface="Helvetica"/>
                   <a:cs typeface="Helvetica"/>
                 </a:rPr>
-                <a:t>Discrep &gt;= +25 vs &lt;+25: subHR = 2.97 (95% CI 0.57-15.41), p = 0.196</a:t>
+                <a:t>Discrep &gt;= +25 vs &lt;+25: subHR = 3.04 (95% CI 0.79-11.70), p = 0.106</a:t>
               </a:r>
             </a:p>
           </p:txBody>

--- a/docs/plots/carbo/jx_carbo_adjcif_akikdigo.pptx
+++ b/docs/plots/carbo/jx_carbo_adjcif_akikdigo.pptx
@@ -2271,7 +2271,7 @@
           </p:nvSpPr>
           <p:spPr>
             <a:xfrm>
-              <a:off x="972874" y="5131020"/>
+              <a:off x="972874" y="5125478"/>
               <a:ext cx="7644336" cy="0"/>
             </a:xfrm>
             <a:custGeom>
@@ -2314,7 +2314,7 @@
           </p:nvSpPr>
           <p:spPr>
             <a:xfrm>
-              <a:off x="972874" y="4232217"/>
+              <a:off x="972874" y="4215590"/>
               <a:ext cx="7644336" cy="0"/>
             </a:xfrm>
             <a:custGeom>
@@ -2357,7 +2357,7 @@
           </p:nvSpPr>
           <p:spPr>
             <a:xfrm>
-              <a:off x="972874" y="3333413"/>
+              <a:off x="972874" y="3305702"/>
               <a:ext cx="7644336" cy="0"/>
             </a:xfrm>
             <a:custGeom>
@@ -2615,7 +2615,7 @@
           </p:nvSpPr>
           <p:spPr>
             <a:xfrm>
-              <a:off x="972874" y="4681618"/>
+              <a:off x="972874" y="4670534"/>
               <a:ext cx="7644336" cy="0"/>
             </a:xfrm>
             <a:custGeom>
@@ -2658,7 +2658,7 @@
           </p:nvSpPr>
           <p:spPr>
             <a:xfrm>
-              <a:off x="972874" y="3782815"/>
+              <a:off x="972874" y="3760646"/>
               <a:ext cx="7644336" cy="0"/>
             </a:xfrm>
             <a:custGeom>
@@ -2701,7 +2701,7 @@
           </p:nvSpPr>
           <p:spPr>
             <a:xfrm>
-              <a:off x="972874" y="2884012"/>
+              <a:off x="972874" y="2850758"/>
               <a:ext cx="7644336" cy="0"/>
             </a:xfrm>
             <a:custGeom>
@@ -2916,54 +2916,54 @@
           </p:nvSpPr>
           <p:spPr>
             <a:xfrm>
-              <a:off x="1320344" y="4620033"/>
-              <a:ext cx="6949396" cy="629430"/>
+              <a:off x="1320344" y="4600366"/>
+              <a:ext cx="6949396" cy="641261"/>
             </a:xfrm>
             <a:custGeom>
               <a:avLst/>
               <a:pathLst>
-                <a:path w="6949396" h="629430">
+                <a:path w="6949396" h="641261">
                   <a:moveTo>
-                    <a:pt x="0" y="629430"/>
+                    <a:pt x="0" y="641261"/>
                   </a:moveTo>
                   <a:lnTo>
-                    <a:pt x="361007" y="629430"/>
-                  </a:lnTo>
-                  <a:lnTo>
-                    <a:pt x="361007" y="542959"/>
-                  </a:lnTo>
-                  <a:lnTo>
-                    <a:pt x="902519" y="542959"/>
-                  </a:lnTo>
-                  <a:lnTo>
-                    <a:pt x="902519" y="453144"/>
-                  </a:lnTo>
-                  <a:lnTo>
-                    <a:pt x="992770" y="453144"/>
-                  </a:lnTo>
-                  <a:lnTo>
-                    <a:pt x="992770" y="363561"/>
-                  </a:lnTo>
-                  <a:lnTo>
-                    <a:pt x="3790580" y="363561"/>
-                  </a:lnTo>
-                  <a:lnTo>
-                    <a:pt x="3790580" y="274042"/>
-                  </a:lnTo>
-                  <a:lnTo>
-                    <a:pt x="4963854" y="274042"/>
-                  </a:lnTo>
-                  <a:lnTo>
-                    <a:pt x="4963854" y="182940"/>
-                  </a:lnTo>
-                  <a:lnTo>
-                    <a:pt x="5956625" y="182940"/>
-                  </a:lnTo>
-                  <a:lnTo>
-                    <a:pt x="5956625" y="92251"/>
-                  </a:lnTo>
-                  <a:lnTo>
-                    <a:pt x="6949396" y="92251"/>
+                    <a:pt x="361007" y="641261"/>
+                  </a:lnTo>
+                  <a:lnTo>
+                    <a:pt x="361007" y="553447"/>
+                  </a:lnTo>
+                  <a:lnTo>
+                    <a:pt x="902519" y="553447"/>
+                  </a:lnTo>
+                  <a:lnTo>
+                    <a:pt x="902519" y="461932"/>
+                  </a:lnTo>
+                  <a:lnTo>
+                    <a:pt x="992770" y="461932"/>
+                  </a:lnTo>
+                  <a:lnTo>
+                    <a:pt x="992770" y="370487"/>
+                  </a:lnTo>
+                  <a:lnTo>
+                    <a:pt x="3790580" y="370487"/>
+                  </a:lnTo>
+                  <a:lnTo>
+                    <a:pt x="3790580" y="279109"/>
+                  </a:lnTo>
+                  <a:lnTo>
+                    <a:pt x="4963854" y="279109"/>
+                  </a:lnTo>
+                  <a:lnTo>
+                    <a:pt x="4963854" y="186310"/>
+                  </a:lnTo>
+                  <a:lnTo>
+                    <a:pt x="5956625" y="186310"/>
+                  </a:lnTo>
+                  <a:lnTo>
+                    <a:pt x="5956625" y="93870"/>
+                  </a:lnTo>
+                  <a:lnTo>
+                    <a:pt x="6949396" y="93870"/>
                   </a:lnTo>
                   <a:lnTo>
                     <a:pt x="6949396" y="0"/>
@@ -2996,53 +2996,53 @@
           <p:spPr>
             <a:xfrm>
               <a:off x="1320344" y="2861938"/>
-              <a:ext cx="6949396" cy="1737622"/>
+              <a:ext cx="6949396" cy="1736935"/>
             </a:xfrm>
             <a:custGeom>
               <a:avLst/>
               <a:pathLst>
-                <a:path w="6949396" h="1737622">
+                <a:path w="6949396" h="1736935">
                   <a:moveTo>
-                    <a:pt x="0" y="1737622"/>
+                    <a:pt x="0" y="1736935"/>
                   </a:moveTo>
                   <a:lnTo>
-                    <a:pt x="361007" y="1737622"/>
-                  </a:lnTo>
-                  <a:lnTo>
-                    <a:pt x="361007" y="1489164"/>
-                  </a:lnTo>
-                  <a:lnTo>
-                    <a:pt x="902519" y="1489164"/>
-                  </a:lnTo>
-                  <a:lnTo>
-                    <a:pt x="902519" y="1234452"/>
-                  </a:lnTo>
-                  <a:lnTo>
-                    <a:pt x="992770" y="1234452"/>
-                  </a:lnTo>
-                  <a:lnTo>
-                    <a:pt x="992770" y="983761"/>
-                  </a:lnTo>
-                  <a:lnTo>
-                    <a:pt x="3790580" y="983761"/>
-                  </a:lnTo>
-                  <a:lnTo>
-                    <a:pt x="3790580" y="736563"/>
-                  </a:lnTo>
-                  <a:lnTo>
-                    <a:pt x="4963854" y="736563"/>
-                  </a:lnTo>
-                  <a:lnTo>
-                    <a:pt x="4963854" y="488353"/>
-                  </a:lnTo>
-                  <a:lnTo>
-                    <a:pt x="5956625" y="488353"/>
-                  </a:lnTo>
-                  <a:lnTo>
-                    <a:pt x="5956625" y="244593"/>
-                  </a:lnTo>
-                  <a:lnTo>
-                    <a:pt x="6949396" y="244593"/>
+                    <a:pt x="361007" y="1736935"/>
+                  </a:lnTo>
+                  <a:lnTo>
+                    <a:pt x="361007" y="1489893"/>
+                  </a:lnTo>
+                  <a:lnTo>
+                    <a:pt x="902519" y="1489893"/>
+                  </a:lnTo>
+                  <a:lnTo>
+                    <a:pt x="902519" y="1235601"/>
+                  </a:lnTo>
+                  <a:lnTo>
+                    <a:pt x="992770" y="1235601"/>
+                  </a:lnTo>
+                  <a:lnTo>
+                    <a:pt x="992770" y="984689"/>
+                  </a:lnTo>
+                  <a:lnTo>
+                    <a:pt x="3790580" y="984689"/>
+                  </a:lnTo>
+                  <a:lnTo>
+                    <a:pt x="3790580" y="737109"/>
+                  </a:lnTo>
+                  <a:lnTo>
+                    <a:pt x="4963854" y="737109"/>
+                  </a:lnTo>
+                  <a:lnTo>
+                    <a:pt x="4963854" y="488860"/>
+                  </a:lnTo>
+                  <a:lnTo>
+                    <a:pt x="5956625" y="488860"/>
+                  </a:lnTo>
+                  <a:lnTo>
+                    <a:pt x="5956625" y="244727"/>
+                  </a:lnTo>
+                  <a:lnTo>
+                    <a:pt x="6949396" y="244727"/>
                   </a:lnTo>
                   <a:lnTo>
                     <a:pt x="6949396" y="0"/>
@@ -3120,7 +3120,7 @@
           </p:nvSpPr>
           <p:spPr>
             <a:xfrm>
-              <a:off x="692708" y="4641568"/>
+              <a:off x="692708" y="4630483"/>
               <a:ext cx="217535" cy="80101"/>
             </a:xfrm>
             <a:prstGeom prst="rect">
@@ -3166,7 +3166,7 @@
           </p:nvSpPr>
           <p:spPr>
             <a:xfrm>
-              <a:off x="692708" y="3742764"/>
+              <a:off x="692708" y="3720595"/>
               <a:ext cx="217535" cy="80101"/>
             </a:xfrm>
             <a:prstGeom prst="rect">
@@ -3212,7 +3212,7 @@
           </p:nvSpPr>
           <p:spPr>
             <a:xfrm>
-              <a:off x="692708" y="2843961"/>
+              <a:off x="692708" y="2810707"/>
               <a:ext cx="217535" cy="80101"/>
             </a:xfrm>
             <a:prstGeom prst="rect">
@@ -3739,7 +3739,7 @@
                   <a:latin typeface="Helvetica"/>
                   <a:cs typeface="Helvetica"/>
                 </a:rPr>
-                <a:t>Discrep &gt;= +25 vs &lt;+25: subHR = 3.04 (95% CI 0.79-11.70), p = 0.106</a:t>
+                <a:t>Discrep &gt;= +25 vs &lt;+25: subHR = 2.97 (95% CI 0.57-15.41), p = 0.196</a:t>
               </a:r>
             </a:p>
           </p:txBody>

--- a/docs/plots/carbo/jx_carbo_adjcif_akikdigo.pptx
+++ b/docs/plots/carbo/jx_carbo_adjcif_akikdigo.pptx
@@ -2948,10 +2948,10 @@
                     <a:pt x="3790580" y="370487"/>
                   </a:lnTo>
                   <a:lnTo>
-                    <a:pt x="3790580" y="279109"/>
-                  </a:lnTo>
-                  <a:lnTo>
-                    <a:pt x="4963854" y="279109"/>
+                    <a:pt x="3790580" y="279110"/>
+                  </a:lnTo>
+                  <a:lnTo>
+                    <a:pt x="4963854" y="279110"/>
                   </a:lnTo>
                   <a:lnTo>
                     <a:pt x="4963854" y="186310"/>

--- a/docs/plots/carbo/jx_carbo_adjcif_akikdigo.pptx
+++ b/docs/plots/carbo/jx_carbo_adjcif_akikdigo.pptx
@@ -2271,26 +2271,26 @@
           </p:nvSpPr>
           <p:spPr>
             <a:xfrm>
-              <a:off x="972874" y="5125478"/>
-              <a:ext cx="7644336" cy="0"/>
+              <a:off x="1113155" y="5074547"/>
+              <a:ext cx="7485076" cy="0"/>
             </a:xfrm>
             <a:custGeom>
               <a:avLst/>
               <a:pathLst>
-                <a:path w="7644336" h="0">
+                <a:path w="7485076" h="0">
                   <a:moveTo>
                     <a:pt x="0" y="0"/>
                   </a:moveTo>
                   <a:lnTo>
-                    <a:pt x="7644336" y="0"/>
-                  </a:lnTo>
-                  <a:lnTo>
-                    <a:pt x="7644336" y="0"/>
+                    <a:pt x="7485076" y="0"/>
+                  </a:lnTo>
+                  <a:lnTo>
+                    <a:pt x="7485076" y="0"/>
                   </a:lnTo>
                 </a:path>
               </a:pathLst>
             </a:custGeom>
-            <a:ln w="6775" cap="flat">
+            <a:ln w="8623" cap="flat">
               <a:solidFill>
                 <a:srgbClr val="EBEBEB">
                   <a:alpha val="100000"/>
@@ -2314,26 +2314,26 @@
           </p:nvSpPr>
           <p:spPr>
             <a:xfrm>
-              <a:off x="972874" y="4215590"/>
-              <a:ext cx="7644336" cy="0"/>
+              <a:off x="1113155" y="4254329"/>
+              <a:ext cx="7485076" cy="0"/>
             </a:xfrm>
             <a:custGeom>
               <a:avLst/>
               <a:pathLst>
-                <a:path w="7644336" h="0">
+                <a:path w="7485076" h="0">
                   <a:moveTo>
                     <a:pt x="0" y="0"/>
                   </a:moveTo>
                   <a:lnTo>
-                    <a:pt x="7644336" y="0"/>
-                  </a:lnTo>
-                  <a:lnTo>
-                    <a:pt x="7644336" y="0"/>
+                    <a:pt x="7485076" y="0"/>
+                  </a:lnTo>
+                  <a:lnTo>
+                    <a:pt x="7485076" y="0"/>
                   </a:lnTo>
                 </a:path>
               </a:pathLst>
             </a:custGeom>
-            <a:ln w="6775" cap="flat">
+            <a:ln w="8623" cap="flat">
               <a:solidFill>
                 <a:srgbClr val="EBEBEB">
                   <a:alpha val="100000"/>
@@ -2357,26 +2357,26 @@
           </p:nvSpPr>
           <p:spPr>
             <a:xfrm>
-              <a:off x="972874" y="3305702"/>
-              <a:ext cx="7644336" cy="0"/>
+              <a:off x="1113155" y="3434111"/>
+              <a:ext cx="7485076" cy="0"/>
             </a:xfrm>
             <a:custGeom>
               <a:avLst/>
               <a:pathLst>
-                <a:path w="7644336" h="0">
+                <a:path w="7485076" h="0">
                   <a:moveTo>
                     <a:pt x="0" y="0"/>
                   </a:moveTo>
                   <a:lnTo>
-                    <a:pt x="7644336" y="0"/>
-                  </a:lnTo>
-                  <a:lnTo>
-                    <a:pt x="7644336" y="0"/>
+                    <a:pt x="7485076" y="0"/>
+                  </a:lnTo>
+                  <a:lnTo>
+                    <a:pt x="7485076" y="0"/>
                   </a:lnTo>
                 </a:path>
               </a:pathLst>
             </a:custGeom>
-            <a:ln w="6775" cap="flat">
+            <a:ln w="8623" cap="flat">
               <a:solidFill>
                 <a:srgbClr val="EBEBEB">
                   <a:alpha val="100000"/>
@@ -2400,15 +2400,15 @@
           </p:nvSpPr>
           <p:spPr>
             <a:xfrm>
-              <a:off x="1591099" y="2583293"/>
-              <a:ext cx="0" cy="3139848"/>
+              <a:off x="1718501" y="2782896"/>
+              <a:ext cx="0" cy="2830414"/>
             </a:xfrm>
             <a:custGeom>
               <a:avLst/>
               <a:pathLst>
-                <a:path w="0" h="3139848">
+                <a:path w="0" h="2830414">
                   <a:moveTo>
-                    <a:pt x="0" y="3139848"/>
+                    <a:pt x="0" y="2830414"/>
                   </a:moveTo>
                   <a:lnTo>
                     <a:pt x="0" y="0"/>
@@ -2419,7 +2419,7 @@
                 </a:path>
               </a:pathLst>
             </a:custGeom>
-            <a:ln w="6775" cap="flat">
+            <a:ln w="8623" cap="flat">
               <a:solidFill>
                 <a:srgbClr val="EBEBEB">
                   <a:alpha val="100000"/>
@@ -2443,15 +2443,15 @@
           </p:nvSpPr>
           <p:spPr>
             <a:xfrm>
-              <a:off x="3396138" y="2583293"/>
-              <a:ext cx="0" cy="3139848"/>
+              <a:off x="3485933" y="2782896"/>
+              <a:ext cx="0" cy="2830414"/>
             </a:xfrm>
             <a:custGeom>
               <a:avLst/>
               <a:pathLst>
-                <a:path w="0" h="3139848">
+                <a:path w="0" h="2830414">
                   <a:moveTo>
-                    <a:pt x="0" y="3139848"/>
+                    <a:pt x="0" y="2830414"/>
                   </a:moveTo>
                   <a:lnTo>
                     <a:pt x="0" y="0"/>
@@ -2462,7 +2462,7 @@
                 </a:path>
               </a:pathLst>
             </a:custGeom>
-            <a:ln w="6775" cap="flat">
+            <a:ln w="8623" cap="flat">
               <a:solidFill>
                 <a:srgbClr val="EBEBEB">
                   <a:alpha val="100000"/>
@@ -2486,15 +2486,15 @@
           </p:nvSpPr>
           <p:spPr>
             <a:xfrm>
-              <a:off x="5201176" y="2583293"/>
-              <a:ext cx="0" cy="3139848"/>
+              <a:off x="5253366" y="2782896"/>
+              <a:ext cx="0" cy="2830414"/>
             </a:xfrm>
             <a:custGeom>
               <a:avLst/>
               <a:pathLst>
-                <a:path w="0" h="3139848">
+                <a:path w="0" h="2830414">
                   <a:moveTo>
-                    <a:pt x="0" y="3139848"/>
+                    <a:pt x="0" y="2830414"/>
                   </a:moveTo>
                   <a:lnTo>
                     <a:pt x="0" y="0"/>
@@ -2505,7 +2505,7 @@
                 </a:path>
               </a:pathLst>
             </a:custGeom>
-            <a:ln w="6775" cap="flat">
+            <a:ln w="8623" cap="flat">
               <a:solidFill>
                 <a:srgbClr val="EBEBEB">
                   <a:alpha val="100000"/>
@@ -2529,15 +2529,15 @@
           </p:nvSpPr>
           <p:spPr>
             <a:xfrm>
-              <a:off x="7006214" y="2583293"/>
-              <a:ext cx="0" cy="3139848"/>
+              <a:off x="7020798" y="2782896"/>
+              <a:ext cx="0" cy="2830414"/>
             </a:xfrm>
             <a:custGeom>
               <a:avLst/>
               <a:pathLst>
-                <a:path w="0" h="3139848">
+                <a:path w="0" h="2830414">
                   <a:moveTo>
-                    <a:pt x="0" y="3139848"/>
+                    <a:pt x="0" y="2830414"/>
                   </a:moveTo>
                   <a:lnTo>
                     <a:pt x="0" y="0"/>
@@ -2548,7 +2548,7 @@
                 </a:path>
               </a:pathLst>
             </a:custGeom>
-            <a:ln w="6775" cap="flat">
+            <a:ln w="8623" cap="flat">
               <a:solidFill>
                 <a:srgbClr val="EBEBEB">
                   <a:alpha val="100000"/>
@@ -2572,26 +2572,26 @@
           </p:nvSpPr>
           <p:spPr>
             <a:xfrm>
-              <a:off x="972874" y="5580422"/>
-              <a:ext cx="7644336" cy="0"/>
+              <a:off x="1113155" y="5484655"/>
+              <a:ext cx="7485076" cy="0"/>
             </a:xfrm>
             <a:custGeom>
               <a:avLst/>
               <a:pathLst>
-                <a:path w="7644336" h="0">
+                <a:path w="7485076" h="0">
                   <a:moveTo>
                     <a:pt x="0" y="0"/>
                   </a:moveTo>
                   <a:lnTo>
-                    <a:pt x="7644336" y="0"/>
-                  </a:lnTo>
-                  <a:lnTo>
-                    <a:pt x="7644336" y="0"/>
+                    <a:pt x="7485076" y="0"/>
+                  </a:lnTo>
+                  <a:lnTo>
+                    <a:pt x="7485076" y="0"/>
                   </a:lnTo>
                 </a:path>
               </a:pathLst>
             </a:custGeom>
-            <a:ln w="13550" cap="flat">
+            <a:ln w="17246" cap="flat">
               <a:solidFill>
                 <a:srgbClr val="EBEBEB">
                   <a:alpha val="100000"/>
@@ -2615,26 +2615,26 @@
           </p:nvSpPr>
           <p:spPr>
             <a:xfrm>
-              <a:off x="972874" y="4670534"/>
-              <a:ext cx="7644336" cy="0"/>
+              <a:off x="1113155" y="4664438"/>
+              <a:ext cx="7485076" cy="0"/>
             </a:xfrm>
             <a:custGeom>
               <a:avLst/>
               <a:pathLst>
-                <a:path w="7644336" h="0">
+                <a:path w="7485076" h="0">
                   <a:moveTo>
                     <a:pt x="0" y="0"/>
                   </a:moveTo>
                   <a:lnTo>
-                    <a:pt x="7644336" y="0"/>
-                  </a:lnTo>
-                  <a:lnTo>
-                    <a:pt x="7644336" y="0"/>
+                    <a:pt x="7485076" y="0"/>
+                  </a:lnTo>
+                  <a:lnTo>
+                    <a:pt x="7485076" y="0"/>
                   </a:lnTo>
                 </a:path>
               </a:pathLst>
             </a:custGeom>
-            <a:ln w="13550" cap="flat">
+            <a:ln w="17246" cap="flat">
               <a:solidFill>
                 <a:srgbClr val="EBEBEB">
                   <a:alpha val="100000"/>
@@ -2658,26 +2658,26 @@
           </p:nvSpPr>
           <p:spPr>
             <a:xfrm>
-              <a:off x="972874" y="3760646"/>
-              <a:ext cx="7644336" cy="0"/>
+              <a:off x="1113155" y="3844220"/>
+              <a:ext cx="7485076" cy="0"/>
             </a:xfrm>
             <a:custGeom>
               <a:avLst/>
               <a:pathLst>
-                <a:path w="7644336" h="0">
+                <a:path w="7485076" h="0">
                   <a:moveTo>
                     <a:pt x="0" y="0"/>
                   </a:moveTo>
                   <a:lnTo>
-                    <a:pt x="7644336" y="0"/>
-                  </a:lnTo>
-                  <a:lnTo>
-                    <a:pt x="7644336" y="0"/>
+                    <a:pt x="7485076" y="0"/>
+                  </a:lnTo>
+                  <a:lnTo>
+                    <a:pt x="7485076" y="0"/>
                   </a:lnTo>
                 </a:path>
               </a:pathLst>
             </a:custGeom>
-            <a:ln w="13550" cap="flat">
+            <a:ln w="17246" cap="flat">
               <a:solidFill>
                 <a:srgbClr val="EBEBEB">
                   <a:alpha val="100000"/>
@@ -2701,26 +2701,26 @@
           </p:nvSpPr>
           <p:spPr>
             <a:xfrm>
-              <a:off x="972874" y="2850758"/>
-              <a:ext cx="7644336" cy="0"/>
+              <a:off x="1113155" y="3024002"/>
+              <a:ext cx="7485076" cy="0"/>
             </a:xfrm>
             <a:custGeom>
               <a:avLst/>
               <a:pathLst>
-                <a:path w="7644336" h="0">
+                <a:path w="7485076" h="0">
                   <a:moveTo>
                     <a:pt x="0" y="0"/>
                   </a:moveTo>
                   <a:lnTo>
-                    <a:pt x="7644336" y="0"/>
-                  </a:lnTo>
-                  <a:lnTo>
-                    <a:pt x="7644336" y="0"/>
+                    <a:pt x="7485076" y="0"/>
+                  </a:lnTo>
+                  <a:lnTo>
+                    <a:pt x="7485076" y="0"/>
                   </a:lnTo>
                 </a:path>
               </a:pathLst>
             </a:custGeom>
-            <a:ln w="13550" cap="flat">
+            <a:ln w="17246" cap="flat">
               <a:solidFill>
                 <a:srgbClr val="EBEBEB">
                   <a:alpha val="100000"/>
@@ -2744,15 +2744,15 @@
           </p:nvSpPr>
           <p:spPr>
             <a:xfrm>
-              <a:off x="2493619" y="2583293"/>
-              <a:ext cx="0" cy="3139848"/>
+              <a:off x="2602217" y="2782896"/>
+              <a:ext cx="0" cy="2830414"/>
             </a:xfrm>
             <a:custGeom>
               <a:avLst/>
               <a:pathLst>
-                <a:path w="0" h="3139848">
+                <a:path w="0" h="2830414">
                   <a:moveTo>
-                    <a:pt x="0" y="3139848"/>
+                    <a:pt x="0" y="2830414"/>
                   </a:moveTo>
                   <a:lnTo>
                     <a:pt x="0" y="0"/>
@@ -2763,7 +2763,7 @@
                 </a:path>
               </a:pathLst>
             </a:custGeom>
-            <a:ln w="13550" cap="flat">
+            <a:ln w="17246" cap="flat">
               <a:solidFill>
                 <a:srgbClr val="EBEBEB">
                   <a:alpha val="100000"/>
@@ -2787,15 +2787,15 @@
           </p:nvSpPr>
           <p:spPr>
             <a:xfrm>
-              <a:off x="4298657" y="2583293"/>
-              <a:ext cx="0" cy="3139848"/>
+              <a:off x="4369649" y="2782896"/>
+              <a:ext cx="0" cy="2830414"/>
             </a:xfrm>
             <a:custGeom>
               <a:avLst/>
               <a:pathLst>
-                <a:path w="0" h="3139848">
+                <a:path w="0" h="2830414">
                   <a:moveTo>
-                    <a:pt x="0" y="3139848"/>
+                    <a:pt x="0" y="2830414"/>
                   </a:moveTo>
                   <a:lnTo>
                     <a:pt x="0" y="0"/>
@@ -2806,7 +2806,7 @@
                 </a:path>
               </a:pathLst>
             </a:custGeom>
-            <a:ln w="13550" cap="flat">
+            <a:ln w="17246" cap="flat">
               <a:solidFill>
                 <a:srgbClr val="EBEBEB">
                   <a:alpha val="100000"/>
@@ -2830,15 +2830,15 @@
           </p:nvSpPr>
           <p:spPr>
             <a:xfrm>
-              <a:off x="6103695" y="2583293"/>
-              <a:ext cx="0" cy="3139848"/>
+              <a:off x="6137082" y="2782896"/>
+              <a:ext cx="0" cy="2830414"/>
             </a:xfrm>
             <a:custGeom>
               <a:avLst/>
               <a:pathLst>
-                <a:path w="0" h="3139848">
+                <a:path w="0" h="2830414">
                   <a:moveTo>
-                    <a:pt x="0" y="3139848"/>
+                    <a:pt x="0" y="2830414"/>
                   </a:moveTo>
                   <a:lnTo>
                     <a:pt x="0" y="0"/>
@@ -2849,7 +2849,7 @@
                 </a:path>
               </a:pathLst>
             </a:custGeom>
-            <a:ln w="13550" cap="flat">
+            <a:ln w="17246" cap="flat">
               <a:solidFill>
                 <a:srgbClr val="EBEBEB">
                   <a:alpha val="100000"/>
@@ -2873,15 +2873,15 @@
           </p:nvSpPr>
           <p:spPr>
             <a:xfrm>
-              <a:off x="7908733" y="2583293"/>
-              <a:ext cx="0" cy="3139848"/>
+              <a:off x="7904514" y="2782896"/>
+              <a:ext cx="0" cy="2830414"/>
             </a:xfrm>
             <a:custGeom>
               <a:avLst/>
               <a:pathLst>
-                <a:path w="0" h="3139848">
+                <a:path w="0" h="2830414">
                   <a:moveTo>
-                    <a:pt x="0" y="3139848"/>
+                    <a:pt x="0" y="2830414"/>
                   </a:moveTo>
                   <a:lnTo>
                     <a:pt x="0" y="0"/>
@@ -2892,7 +2892,7 @@
                 </a:path>
               </a:pathLst>
             </a:custGeom>
-            <a:ln w="13550" cap="flat">
+            <a:ln w="17246" cap="flat">
               <a:solidFill>
                 <a:srgbClr val="EBEBEB">
                   <a:alpha val="100000"/>
@@ -2916,57 +2916,57 @@
           </p:nvSpPr>
           <p:spPr>
             <a:xfrm>
-              <a:off x="1320344" y="4600366"/>
-              <a:ext cx="6949396" cy="641261"/>
+              <a:off x="1453386" y="4601185"/>
+              <a:ext cx="6804615" cy="578064"/>
             </a:xfrm>
             <a:custGeom>
               <a:avLst/>
               <a:pathLst>
-                <a:path w="6949396" h="641261">
+                <a:path w="6804615" h="578064">
                   <a:moveTo>
-                    <a:pt x="0" y="641261"/>
+                    <a:pt x="0" y="578064"/>
                   </a:moveTo>
                   <a:lnTo>
-                    <a:pt x="361007" y="641261"/>
-                  </a:lnTo>
-                  <a:lnTo>
-                    <a:pt x="361007" y="553447"/>
-                  </a:lnTo>
-                  <a:lnTo>
-                    <a:pt x="902519" y="553447"/>
-                  </a:lnTo>
-                  <a:lnTo>
-                    <a:pt x="902519" y="461932"/>
-                  </a:lnTo>
-                  <a:lnTo>
-                    <a:pt x="992770" y="461932"/>
-                  </a:lnTo>
-                  <a:lnTo>
-                    <a:pt x="992770" y="370487"/>
-                  </a:lnTo>
-                  <a:lnTo>
-                    <a:pt x="3790580" y="370487"/>
-                  </a:lnTo>
-                  <a:lnTo>
-                    <a:pt x="3790580" y="279110"/>
-                  </a:lnTo>
-                  <a:lnTo>
-                    <a:pt x="4963854" y="279110"/>
-                  </a:lnTo>
-                  <a:lnTo>
-                    <a:pt x="4963854" y="186310"/>
-                  </a:lnTo>
-                  <a:lnTo>
-                    <a:pt x="5956625" y="186310"/>
-                  </a:lnTo>
-                  <a:lnTo>
-                    <a:pt x="5956625" y="93870"/>
-                  </a:lnTo>
-                  <a:lnTo>
-                    <a:pt x="6949396" y="93870"/>
-                  </a:lnTo>
-                  <a:lnTo>
-                    <a:pt x="6949396" y="0"/>
+                    <a:pt x="353486" y="578064"/>
+                  </a:lnTo>
+                  <a:lnTo>
+                    <a:pt x="353486" y="498904"/>
+                  </a:lnTo>
+                  <a:lnTo>
+                    <a:pt x="883716" y="498904"/>
+                  </a:lnTo>
+                  <a:lnTo>
+                    <a:pt x="883716" y="416408"/>
+                  </a:lnTo>
+                  <a:lnTo>
+                    <a:pt x="972087" y="416408"/>
+                  </a:lnTo>
+                  <a:lnTo>
+                    <a:pt x="972087" y="333975"/>
+                  </a:lnTo>
+                  <a:lnTo>
+                    <a:pt x="3711608" y="333975"/>
+                  </a:lnTo>
+                  <a:lnTo>
+                    <a:pt x="3711608" y="251603"/>
+                  </a:lnTo>
+                  <a:lnTo>
+                    <a:pt x="4860439" y="251603"/>
+                  </a:lnTo>
+                  <a:lnTo>
+                    <a:pt x="4860439" y="167949"/>
+                  </a:lnTo>
+                  <a:lnTo>
+                    <a:pt x="5832527" y="167949"/>
+                  </a:lnTo>
+                  <a:lnTo>
+                    <a:pt x="5832527" y="84619"/>
+                  </a:lnTo>
+                  <a:lnTo>
+                    <a:pt x="6804615" y="84619"/>
+                  </a:lnTo>
+                  <a:lnTo>
+                    <a:pt x="6804615" y="0"/>
                   </a:lnTo>
                 </a:path>
               </a:pathLst>
@@ -2995,57 +2995,57 @@
           </p:nvSpPr>
           <p:spPr>
             <a:xfrm>
-              <a:off x="1320344" y="2861938"/>
-              <a:ext cx="6949396" cy="1736935"/>
+              <a:off x="1453386" y="3034080"/>
+              <a:ext cx="6804615" cy="1565759"/>
             </a:xfrm>
             <a:custGeom>
               <a:avLst/>
               <a:pathLst>
-                <a:path w="6949396" h="1736935">
+                <a:path w="6804615" h="1565759">
                   <a:moveTo>
-                    <a:pt x="0" y="1736935"/>
+                    <a:pt x="0" y="1565759"/>
                   </a:moveTo>
                   <a:lnTo>
-                    <a:pt x="361007" y="1736935"/>
-                  </a:lnTo>
-                  <a:lnTo>
-                    <a:pt x="361007" y="1489893"/>
-                  </a:lnTo>
-                  <a:lnTo>
-                    <a:pt x="902519" y="1489893"/>
-                  </a:lnTo>
-                  <a:lnTo>
-                    <a:pt x="902519" y="1235601"/>
-                  </a:lnTo>
-                  <a:lnTo>
-                    <a:pt x="992770" y="1235601"/>
-                  </a:lnTo>
-                  <a:lnTo>
-                    <a:pt x="992770" y="984689"/>
-                  </a:lnTo>
-                  <a:lnTo>
-                    <a:pt x="3790580" y="984689"/>
-                  </a:lnTo>
-                  <a:lnTo>
-                    <a:pt x="3790580" y="737109"/>
-                  </a:lnTo>
-                  <a:lnTo>
-                    <a:pt x="4963854" y="737109"/>
-                  </a:lnTo>
-                  <a:lnTo>
-                    <a:pt x="4963854" y="488860"/>
-                  </a:lnTo>
-                  <a:lnTo>
-                    <a:pt x="5956625" y="488860"/>
-                  </a:lnTo>
-                  <a:lnTo>
-                    <a:pt x="5956625" y="244727"/>
-                  </a:lnTo>
-                  <a:lnTo>
-                    <a:pt x="6949396" y="244727"/>
-                  </a:lnTo>
-                  <a:lnTo>
-                    <a:pt x="6949396" y="0"/>
+                    <a:pt x="353486" y="1565759"/>
+                  </a:lnTo>
+                  <a:lnTo>
+                    <a:pt x="353486" y="1343063"/>
+                  </a:lnTo>
+                  <a:lnTo>
+                    <a:pt x="883716" y="1343063"/>
+                  </a:lnTo>
+                  <a:lnTo>
+                    <a:pt x="883716" y="1113831"/>
+                  </a:lnTo>
+                  <a:lnTo>
+                    <a:pt x="972087" y="1113831"/>
+                  </a:lnTo>
+                  <a:lnTo>
+                    <a:pt x="972087" y="887647"/>
+                  </a:lnTo>
+                  <a:lnTo>
+                    <a:pt x="3711608" y="887647"/>
+                  </a:lnTo>
+                  <a:lnTo>
+                    <a:pt x="3711608" y="664466"/>
+                  </a:lnTo>
+                  <a:lnTo>
+                    <a:pt x="4860439" y="664466"/>
+                  </a:lnTo>
+                  <a:lnTo>
+                    <a:pt x="4860439" y="440683"/>
+                  </a:lnTo>
+                  <a:lnTo>
+                    <a:pt x="5832527" y="440683"/>
+                  </a:lnTo>
+                  <a:lnTo>
+                    <a:pt x="5832527" y="220609"/>
+                  </a:lnTo>
+                  <a:lnTo>
+                    <a:pt x="6804615" y="220609"/>
+                  </a:lnTo>
+                  <a:lnTo>
+                    <a:pt x="6804615" y="0"/>
                   </a:lnTo>
                 </a:path>
               </a:pathLst>
@@ -3074,8 +3074,8 @@
           </p:nvSpPr>
           <p:spPr>
             <a:xfrm>
-              <a:off x="692708" y="5540371"/>
-              <a:ext cx="217535" cy="80101"/>
+              <a:off x="756929" y="5433678"/>
+              <a:ext cx="276514" cy="101955"/>
             </a:xfrm>
             <a:prstGeom prst="rect">
               <a:avLst/>
@@ -3088,7 +3088,7 @@
             <a:p>
               <a:pPr algn="l" marL="0" marR="0" indent="0">
                 <a:lnSpc>
-                  <a:spcPts val="880"/>
+                  <a:spcPts val="1120"/>
                 </a:lnSpc>
                 <a:spcBef>
                   <a:spcPts val="0"/>
@@ -3098,7 +3098,7 @@
                 </a:spcAft>
               </a:pPr>
               <a:r>
-                <a:rPr sz="880">
+                <a:rPr sz="1120">
                   <a:solidFill>
                     <a:srgbClr val="4D4D4D">
                       <a:alpha val="100000"/>
@@ -3120,8 +3120,8 @@
           </p:nvSpPr>
           <p:spPr>
             <a:xfrm>
-              <a:off x="692708" y="4630483"/>
-              <a:ext cx="217535" cy="80101"/>
+              <a:off x="756929" y="4613460"/>
+              <a:ext cx="276514" cy="101955"/>
             </a:xfrm>
             <a:prstGeom prst="rect">
               <a:avLst/>
@@ -3134,7 +3134,7 @@
             <a:p>
               <a:pPr algn="l" marL="0" marR="0" indent="0">
                 <a:lnSpc>
-                  <a:spcPts val="880"/>
+                  <a:spcPts val="1120"/>
                 </a:lnSpc>
                 <a:spcBef>
                   <a:spcPts val="0"/>
@@ -3144,7 +3144,7 @@
                 </a:spcAft>
               </a:pPr>
               <a:r>
-                <a:rPr sz="880">
+                <a:rPr sz="1120">
                   <a:solidFill>
                     <a:srgbClr val="4D4D4D">
                       <a:alpha val="100000"/>
@@ -3166,8 +3166,8 @@
           </p:nvSpPr>
           <p:spPr>
             <a:xfrm>
-              <a:off x="692708" y="3720595"/>
-              <a:ext cx="217535" cy="80101"/>
+              <a:off x="756929" y="3793242"/>
+              <a:ext cx="276514" cy="101955"/>
             </a:xfrm>
             <a:prstGeom prst="rect">
               <a:avLst/>
@@ -3180,7 +3180,7 @@
             <a:p>
               <a:pPr algn="l" marL="0" marR="0" indent="0">
                 <a:lnSpc>
-                  <a:spcPts val="880"/>
+                  <a:spcPts val="1120"/>
                 </a:lnSpc>
                 <a:spcBef>
                   <a:spcPts val="0"/>
@@ -3190,7 +3190,7 @@
                 </a:spcAft>
               </a:pPr>
               <a:r>
-                <a:rPr sz="880">
+                <a:rPr sz="1120">
                   <a:solidFill>
                     <a:srgbClr val="4D4D4D">
                       <a:alpha val="100000"/>
@@ -3212,8 +3212,8 @@
           </p:nvSpPr>
           <p:spPr>
             <a:xfrm>
-              <a:off x="692708" y="2810707"/>
-              <a:ext cx="217535" cy="80101"/>
+              <a:off x="756929" y="2973024"/>
+              <a:ext cx="276514" cy="101955"/>
             </a:xfrm>
             <a:prstGeom prst="rect">
               <a:avLst/>
@@ -3226,7 +3226,7 @@
             <a:p>
               <a:pPr algn="l" marL="0" marR="0" indent="0">
                 <a:lnSpc>
-                  <a:spcPts val="880"/>
+                  <a:spcPts val="1120"/>
                 </a:lnSpc>
                 <a:spcBef>
                   <a:spcPts val="0"/>
@@ -3236,7 +3236,7 @@
                 </a:spcAft>
               </a:pPr>
               <a:r>
-                <a:rPr sz="880">
+                <a:rPr sz="1120">
                   <a:solidFill>
                     <a:srgbClr val="4D4D4D">
                       <a:alpha val="100000"/>
@@ -3258,8 +3258,8 @@
           </p:nvSpPr>
           <p:spPr>
             <a:xfrm>
-              <a:off x="2431439" y="5785772"/>
-              <a:ext cx="124358" cy="80101"/>
+              <a:off x="2523213" y="5693022"/>
+              <a:ext cx="158008" cy="101955"/>
             </a:xfrm>
             <a:prstGeom prst="rect">
               <a:avLst/>
@@ -3272,7 +3272,7 @@
             <a:p>
               <a:pPr algn="l" marL="0" marR="0" indent="0">
                 <a:lnSpc>
-                  <a:spcPts val="880"/>
+                  <a:spcPts val="1120"/>
                 </a:lnSpc>
                 <a:spcBef>
                   <a:spcPts val="0"/>
@@ -3282,7 +3282,7 @@
                 </a:spcAft>
               </a:pPr>
               <a:r>
-                <a:rPr sz="880">
+                <a:rPr sz="1120">
                   <a:solidFill>
                     <a:srgbClr val="4D4D4D">
                       <a:alpha val="100000"/>
@@ -3304,8 +3304,8 @@
           </p:nvSpPr>
           <p:spPr>
             <a:xfrm>
-              <a:off x="4236477" y="5785772"/>
-              <a:ext cx="124358" cy="80101"/>
+              <a:off x="4290645" y="5693022"/>
+              <a:ext cx="158008" cy="101955"/>
             </a:xfrm>
             <a:prstGeom prst="rect">
               <a:avLst/>
@@ -3318,7 +3318,7 @@
             <a:p>
               <a:pPr algn="l" marL="0" marR="0" indent="0">
                 <a:lnSpc>
-                  <a:spcPts val="880"/>
+                  <a:spcPts val="1120"/>
                 </a:lnSpc>
                 <a:spcBef>
                   <a:spcPts val="0"/>
@@ -3328,7 +3328,7 @@
                 </a:spcAft>
               </a:pPr>
               <a:r>
-                <a:rPr sz="880">
+                <a:rPr sz="1120">
                   <a:solidFill>
                     <a:srgbClr val="4D4D4D">
                       <a:alpha val="100000"/>
@@ -3350,8 +3350,8 @@
           </p:nvSpPr>
           <p:spPr>
             <a:xfrm>
-              <a:off x="6041516" y="5785772"/>
-              <a:ext cx="124358" cy="80101"/>
+              <a:off x="6058078" y="5693022"/>
+              <a:ext cx="158008" cy="101955"/>
             </a:xfrm>
             <a:prstGeom prst="rect">
               <a:avLst/>
@@ -3364,7 +3364,7 @@
             <a:p>
               <a:pPr algn="l" marL="0" marR="0" indent="0">
                 <a:lnSpc>
-                  <a:spcPts val="880"/>
+                  <a:spcPts val="1120"/>
                 </a:lnSpc>
                 <a:spcBef>
                   <a:spcPts val="0"/>
@@ -3374,7 +3374,7 @@
                 </a:spcAft>
               </a:pPr>
               <a:r>
-                <a:rPr sz="880">
+                <a:rPr sz="1120">
                   <a:solidFill>
                     <a:srgbClr val="4D4D4D">
                       <a:alpha val="100000"/>
@@ -3396,8 +3396,8 @@
           </p:nvSpPr>
           <p:spPr>
             <a:xfrm>
-              <a:off x="7846554" y="5785772"/>
-              <a:ext cx="124358" cy="80101"/>
+              <a:off x="7825510" y="5693022"/>
+              <a:ext cx="158008" cy="101955"/>
             </a:xfrm>
             <a:prstGeom prst="rect">
               <a:avLst/>
@@ -3410,7 +3410,7 @@
             <a:p>
               <a:pPr algn="l" marL="0" marR="0" indent="0">
                 <a:lnSpc>
-                  <a:spcPts val="880"/>
+                  <a:spcPts val="1120"/>
                 </a:lnSpc>
                 <a:spcBef>
                   <a:spcPts val="0"/>
@@ -3420,7 +3420,7 @@
                 </a:spcAft>
               </a:pPr>
               <a:r>
-                <a:rPr sz="880">
+                <a:rPr sz="1120">
                   <a:solidFill>
                     <a:srgbClr val="4D4D4D">
                       <a:alpha val="100000"/>
@@ -3442,8 +3442,8 @@
           </p:nvSpPr>
           <p:spPr>
             <a:xfrm>
-              <a:off x="4197162" y="5925448"/>
-              <a:ext cx="1195760" cy="100218"/>
+              <a:off x="4094958" y="5870717"/>
+              <a:ext cx="1521470" cy="127558"/>
             </a:xfrm>
             <a:prstGeom prst="rect">
               <a:avLst/>
@@ -3456,7 +3456,7 @@
             <a:p>
               <a:pPr algn="l" marL="0" marR="0" indent="0">
                 <a:lnSpc>
-                  <a:spcPts val="1100"/>
+                  <a:spcPts val="1400"/>
                 </a:lnSpc>
                 <a:spcBef>
                   <a:spcPts val="0"/>
@@ -3466,7 +3466,7 @@
                 </a:spcAft>
               </a:pPr>
               <a:r>
-                <a:rPr sz="1100">
+                <a:rPr sz="1400">
                   <a:solidFill>
                     <a:srgbClr val="000000">
                       <a:alpha val="100000"/>
@@ -3488,8 +3488,8 @@
           </p:nvSpPr>
           <p:spPr>
             <a:xfrm rot="-5400000">
-              <a:off x="-87047" y="4103109"/>
-              <a:ext cx="1327891" cy="100218"/>
+              <a:off x="-235221" y="4134324"/>
+              <a:ext cx="1689536" cy="127558"/>
             </a:xfrm>
             <a:prstGeom prst="rect">
               <a:avLst/>
@@ -3502,7 +3502,7 @@
             <a:p>
               <a:pPr algn="l" marL="0" marR="0" indent="0">
                 <a:lnSpc>
-                  <a:spcPts val="1100"/>
+                  <a:spcPts val="1400"/>
                 </a:lnSpc>
                 <a:spcBef>
                   <a:spcPts val="0"/>
@@ -3512,7 +3512,7 @@
                 </a:spcAft>
               </a:pPr>
               <a:r>
-                <a:rPr sz="1100">
+                <a:rPr sz="1400">
                   <a:solidFill>
                     <a:srgbClr val="000000">
                       <a:alpha val="100000"/>
@@ -3534,7 +3534,7 @@
           </p:nvSpPr>
           <p:spPr>
             <a:xfrm>
-              <a:off x="3578565" y="2264798"/>
+              <a:off x="3362626" y="2407465"/>
               <a:ext cx="175564" cy="0"/>
             </a:xfrm>
             <a:custGeom>
@@ -3574,7 +3574,7 @@
           </p:nvSpPr>
           <p:spPr>
             <a:xfrm>
-              <a:off x="4819138" y="2264798"/>
+              <a:off x="4880455" y="2407465"/>
               <a:ext cx="175564" cy="0"/>
             </a:xfrm>
             <a:custGeom>
@@ -3614,8 +3614,8 @@
           </p:nvSpPr>
           <p:spPr>
             <a:xfrm>
-              <a:off x="3845665" y="2224748"/>
-              <a:ext cx="881938" cy="80101"/>
+              <a:off x="3648704" y="2356487"/>
+              <a:ext cx="1121237" cy="101955"/>
             </a:xfrm>
             <a:prstGeom prst="rect">
               <a:avLst/>
@@ -3628,7 +3628,7 @@
             <a:p>
               <a:pPr algn="l" marL="0" marR="0" indent="0">
                 <a:lnSpc>
-                  <a:spcPts val="880"/>
+                  <a:spcPts val="1120"/>
                 </a:lnSpc>
                 <a:spcBef>
                   <a:spcPts val="0"/>
@@ -3638,7 +3638,7 @@
                 </a:spcAft>
               </a:pPr>
               <a:r>
-                <a:rPr sz="880">
+                <a:rPr sz="1120">
                   <a:solidFill>
                     <a:srgbClr val="000000">
                       <a:alpha val="100000"/>
@@ -3660,8 +3660,8 @@
           </p:nvSpPr>
           <p:spPr>
             <a:xfrm>
-              <a:off x="5086238" y="2224748"/>
-              <a:ext cx="947226" cy="80101"/>
+              <a:off x="5166533" y="2356487"/>
+              <a:ext cx="1204173" cy="101955"/>
             </a:xfrm>
             <a:prstGeom prst="rect">
               <a:avLst/>
@@ -3674,7 +3674,7 @@
             <a:p>
               <a:pPr algn="l" marL="0" marR="0" indent="0">
                 <a:lnSpc>
-                  <a:spcPts val="880"/>
+                  <a:spcPts val="1120"/>
                 </a:lnSpc>
                 <a:spcBef>
                   <a:spcPts val="0"/>
@@ -3684,7 +3684,7 @@
                 </a:spcAft>
               </a:pPr>
               <a:r>
-                <a:rPr sz="880">
+                <a:rPr sz="1120">
                   <a:solidFill>
                     <a:srgbClr val="000000">
                       <a:alpha val="100000"/>
@@ -3706,8 +3706,8 @@
           </p:nvSpPr>
           <p:spPr>
             <a:xfrm>
-              <a:off x="972874" y="1896563"/>
-              <a:ext cx="3984498" cy="91165"/>
+              <a:off x="1113155" y="1977589"/>
+              <a:ext cx="4782220" cy="109362"/>
             </a:xfrm>
             <a:prstGeom prst="rect">
               <a:avLst/>
@@ -3720,7 +3720,7 @@
             <a:p>
               <a:pPr algn="l" marL="0" marR="0" indent="0">
                 <a:lnSpc>
-                  <a:spcPts val="1000"/>
+                  <a:spcPts val="1200"/>
                 </a:lnSpc>
                 <a:spcBef>
                   <a:spcPts val="0"/>
@@ -3730,7 +3730,7 @@
                 </a:spcAft>
               </a:pPr>
               <a:r>
-                <a:rPr sz="1000">
+                <a:rPr sz="1200">
                   <a:solidFill>
                     <a:srgbClr val="404040">
                       <a:alpha val="100000"/>
@@ -3752,8 +3752,8 @@
           </p:nvSpPr>
           <p:spPr>
             <a:xfrm>
-              <a:off x="972874" y="1669789"/>
-              <a:ext cx="967983" cy="120152"/>
+              <a:off x="1113155" y="1688767"/>
+              <a:ext cx="1232702" cy="153070"/>
             </a:xfrm>
             <a:prstGeom prst="rect">
               <a:avLst/>
@@ -3766,7 +3766,7 @@
             <a:p>
               <a:pPr algn="l" marL="0" marR="0" indent="0">
                 <a:lnSpc>
-                  <a:spcPts val="1320"/>
+                  <a:spcPts val="1680"/>
                 </a:lnSpc>
                 <a:spcBef>
                   <a:spcPts val="0"/>
@@ -3776,7 +3776,7 @@
                 </a:spcAft>
               </a:pPr>
               <a:r>
-                <a:rPr sz="1320">
+                <a:rPr sz="1680">
                   <a:solidFill>
                     <a:srgbClr val="000000">
                       <a:alpha val="100000"/>
